--- a/a/New CFE logo final long.pptx
+++ b/a/New CFE logo final long.pptx
@@ -6,6 +6,7 @@
   </p:sldMasterIdLst>
   <p:sldIdLst>
     <p:sldId id="256" r:id="rId2"/>
+    <p:sldId id="257" r:id="rId3"/>
   </p:sldIdLst>
   <p:sldSz cx="27432000" cy="6858000"/>
   <p:notesSz cx="6858000" cy="9144000"/>
@@ -288,7 +289,7 @@
           <a:p>
             <a:fld id="{DD72279B-67D5-48A9-B319-AD0740CF3773}" type="datetimeFigureOut">
               <a:rPr lang="ru-RU" smtClean="0"/>
-              <a:t>19.06.2024</a:t>
+              <a:t>28.06.2024</a:t>
             </a:fld>
             <a:endParaRPr lang="ru-RU"/>
           </a:p>
@@ -458,7 +459,7 @@
           <a:p>
             <a:fld id="{DD72279B-67D5-48A9-B319-AD0740CF3773}" type="datetimeFigureOut">
               <a:rPr lang="ru-RU" smtClean="0"/>
-              <a:t>19.06.2024</a:t>
+              <a:t>28.06.2024</a:t>
             </a:fld>
             <a:endParaRPr lang="ru-RU"/>
           </a:p>
@@ -638,7 +639,7 @@
           <a:p>
             <a:fld id="{DD72279B-67D5-48A9-B319-AD0740CF3773}" type="datetimeFigureOut">
               <a:rPr lang="ru-RU" smtClean="0"/>
-              <a:t>19.06.2024</a:t>
+              <a:t>28.06.2024</a:t>
             </a:fld>
             <a:endParaRPr lang="ru-RU"/>
           </a:p>
@@ -808,7 +809,7 @@
           <a:p>
             <a:fld id="{DD72279B-67D5-48A9-B319-AD0740CF3773}" type="datetimeFigureOut">
               <a:rPr lang="ru-RU" smtClean="0"/>
-              <a:t>19.06.2024</a:t>
+              <a:t>28.06.2024</a:t>
             </a:fld>
             <a:endParaRPr lang="ru-RU"/>
           </a:p>
@@ -1054,7 +1055,7 @@
           <a:p>
             <a:fld id="{DD72279B-67D5-48A9-B319-AD0740CF3773}" type="datetimeFigureOut">
               <a:rPr lang="ru-RU" smtClean="0"/>
-              <a:t>19.06.2024</a:t>
+              <a:t>28.06.2024</a:t>
             </a:fld>
             <a:endParaRPr lang="ru-RU"/>
           </a:p>
@@ -1342,7 +1343,7 @@
           <a:p>
             <a:fld id="{DD72279B-67D5-48A9-B319-AD0740CF3773}" type="datetimeFigureOut">
               <a:rPr lang="ru-RU" smtClean="0"/>
-              <a:t>19.06.2024</a:t>
+              <a:t>28.06.2024</a:t>
             </a:fld>
             <a:endParaRPr lang="ru-RU"/>
           </a:p>
@@ -1764,7 +1765,7 @@
           <a:p>
             <a:fld id="{DD72279B-67D5-48A9-B319-AD0740CF3773}" type="datetimeFigureOut">
               <a:rPr lang="ru-RU" smtClean="0"/>
-              <a:t>19.06.2024</a:t>
+              <a:t>28.06.2024</a:t>
             </a:fld>
             <a:endParaRPr lang="ru-RU"/>
           </a:p>
@@ -1882,7 +1883,7 @@
           <a:p>
             <a:fld id="{DD72279B-67D5-48A9-B319-AD0740CF3773}" type="datetimeFigureOut">
               <a:rPr lang="ru-RU" smtClean="0"/>
-              <a:t>19.06.2024</a:t>
+              <a:t>28.06.2024</a:t>
             </a:fld>
             <a:endParaRPr lang="ru-RU"/>
           </a:p>
@@ -1977,7 +1978,7 @@
           <a:p>
             <a:fld id="{DD72279B-67D5-48A9-B319-AD0740CF3773}" type="datetimeFigureOut">
               <a:rPr lang="ru-RU" smtClean="0"/>
-              <a:t>19.06.2024</a:t>
+              <a:t>28.06.2024</a:t>
             </a:fld>
             <a:endParaRPr lang="ru-RU"/>
           </a:p>
@@ -2254,7 +2255,7 @@
           <a:p>
             <a:fld id="{DD72279B-67D5-48A9-B319-AD0740CF3773}" type="datetimeFigureOut">
               <a:rPr lang="ru-RU" smtClean="0"/>
-              <a:t>19.06.2024</a:t>
+              <a:t>28.06.2024</a:t>
             </a:fld>
             <a:endParaRPr lang="ru-RU"/>
           </a:p>
@@ -2507,7 +2508,7 @@
           <a:p>
             <a:fld id="{DD72279B-67D5-48A9-B319-AD0740CF3773}" type="datetimeFigureOut">
               <a:rPr lang="ru-RU" smtClean="0"/>
-              <a:t>19.06.2024</a:t>
+              <a:t>28.06.2024</a:t>
             </a:fld>
             <a:endParaRPr lang="ru-RU"/>
           </a:p>
@@ -2720,7 +2721,7 @@
           <a:p>
             <a:fld id="{DD72279B-67D5-48A9-B319-AD0740CF3773}" type="datetimeFigureOut">
               <a:rPr lang="ru-RU" smtClean="0"/>
-              <a:t>19.06.2024</a:t>
+              <a:t>28.06.2024</a:t>
             </a:fld>
             <a:endParaRPr lang="ru-RU"/>
           </a:p>
@@ -3526,6 +3527,426 @@
 </p:sld>
 </file>
 
+<file path=ppt/slides/slide2.xml><?xml version="1.0" encoding="utf-8"?>
+<p:sld xmlns:a="http://schemas.openxmlformats.org/drawingml/2006/main" xmlns:r="http://schemas.openxmlformats.org/officeDocument/2006/relationships" xmlns:p="http://schemas.openxmlformats.org/presentationml/2006/main">
+  <p:cSld>
+    <p:spTree>
+      <p:nvGrpSpPr>
+        <p:cNvPr id="1" name=""/>
+        <p:cNvGrpSpPr/>
+        <p:nvPr/>
+      </p:nvGrpSpPr>
+      <p:grpSpPr>
+        <a:xfrm>
+          <a:off x="0" y="0"/>
+          <a:ext cx="0" cy="0"/>
+          <a:chOff x="0" y="0"/>
+          <a:chExt cx="0" cy="0"/>
+        </a:xfrm>
+      </p:grpSpPr>
+      <p:grpSp>
+        <p:nvGrpSpPr>
+          <p:cNvPr id="5" name="Группа 4"/>
+          <p:cNvGrpSpPr/>
+          <p:nvPr/>
+        </p:nvGrpSpPr>
+        <p:grpSpPr>
+          <a:xfrm>
+            <a:off x="209449" y="990600"/>
+            <a:ext cx="4267200" cy="4881881"/>
+            <a:chOff x="1638300" y="838199"/>
+            <a:chExt cx="4267200" cy="4881881"/>
+          </a:xfrm>
+        </p:grpSpPr>
+        <p:sp>
+          <p:nvSpPr>
+            <p:cNvPr id="9" name="Пятиугольник 8"/>
+            <p:cNvSpPr/>
+            <p:nvPr/>
+          </p:nvSpPr>
+          <p:spPr>
+            <a:xfrm>
+              <a:off x="1670050" y="2514600"/>
+              <a:ext cx="2120900" cy="1520305"/>
+            </a:xfrm>
+            <a:prstGeom prst="homePlate">
+              <a:avLst>
+                <a:gd name="adj" fmla="val 44607"/>
+              </a:avLst>
+            </a:prstGeom>
+            <a:gradFill>
+              <a:gsLst>
+                <a:gs pos="39000">
+                  <a:srgbClr val="82A0FA"/>
+                </a:gs>
+                <a:gs pos="0">
+                  <a:srgbClr val="C8DFFA"/>
+                </a:gs>
+                <a:gs pos="100000">
+                  <a:srgbClr val="2446C8"/>
+                </a:gs>
+              </a:gsLst>
+              <a:lin ang="2700000" scaled="0"/>
+            </a:gradFill>
+            <a:ln>
+              <a:noFill/>
+            </a:ln>
+          </p:spPr>
+          <p:style>
+            <a:lnRef idx="2">
+              <a:schemeClr val="accent1">
+                <a:shade val="50000"/>
+              </a:schemeClr>
+            </a:lnRef>
+            <a:fillRef idx="1">
+              <a:schemeClr val="accent1"/>
+            </a:fillRef>
+            <a:effectRef idx="0">
+              <a:schemeClr val="accent1"/>
+            </a:effectRef>
+            <a:fontRef idx="minor">
+              <a:schemeClr val="lt1"/>
+            </a:fontRef>
+          </p:style>
+          <p:txBody>
+            <a:bodyPr rtlCol="0" anchor="ctr"/>
+            <a:lstStyle/>
+            <a:p>
+              <a:pPr algn="ctr"/>
+              <a:endParaRPr lang="ru-RU"/>
+            </a:p>
+          </p:txBody>
+        </p:sp>
+        <p:sp>
+          <p:nvSpPr>
+            <p:cNvPr id="10" name="Трапеция 9"/>
+            <p:cNvSpPr/>
+            <p:nvPr/>
+          </p:nvSpPr>
+          <p:spPr>
+            <a:xfrm rot="10800000">
+              <a:off x="1638300" y="838199"/>
+              <a:ext cx="4191000" cy="1447801"/>
+            </a:xfrm>
+            <a:prstGeom prst="trapezoid">
+              <a:avLst>
+                <a:gd name="adj" fmla="val 82332"/>
+              </a:avLst>
+            </a:prstGeom>
+            <a:gradFill>
+              <a:gsLst>
+                <a:gs pos="38000">
+                  <a:srgbClr val="82A0FA"/>
+                </a:gs>
+                <a:gs pos="0">
+                  <a:srgbClr val="C8DFFA"/>
+                </a:gs>
+                <a:gs pos="100000">
+                  <a:srgbClr val="2446C8"/>
+                </a:gs>
+              </a:gsLst>
+              <a:lin ang="2700000" scaled="0"/>
+            </a:gradFill>
+            <a:ln>
+              <a:noFill/>
+            </a:ln>
+          </p:spPr>
+          <p:style>
+            <a:lnRef idx="2">
+              <a:schemeClr val="accent1">
+                <a:shade val="50000"/>
+              </a:schemeClr>
+            </a:lnRef>
+            <a:fillRef idx="1">
+              <a:schemeClr val="accent1"/>
+            </a:fillRef>
+            <a:effectRef idx="0">
+              <a:schemeClr val="accent1"/>
+            </a:effectRef>
+            <a:fontRef idx="minor">
+              <a:schemeClr val="lt1"/>
+            </a:fontRef>
+          </p:style>
+          <p:txBody>
+            <a:bodyPr rtlCol="0" anchor="ctr"/>
+            <a:lstStyle/>
+            <a:p>
+              <a:pPr algn="ctr"/>
+              <a:endParaRPr lang="ru-RU"/>
+            </a:p>
+          </p:txBody>
+        </p:sp>
+        <p:sp>
+          <p:nvSpPr>
+            <p:cNvPr id="11" name="Трапеция 10"/>
+            <p:cNvSpPr/>
+            <p:nvPr/>
+          </p:nvSpPr>
+          <p:spPr>
+            <a:xfrm>
+              <a:off x="1714500" y="4263505"/>
+              <a:ext cx="4191000" cy="1456575"/>
+            </a:xfrm>
+            <a:prstGeom prst="trapezoid">
+              <a:avLst>
+                <a:gd name="adj" fmla="val 84947"/>
+              </a:avLst>
+            </a:prstGeom>
+            <a:gradFill>
+              <a:gsLst>
+                <a:gs pos="69000">
+                  <a:srgbClr val="82A0FA"/>
+                </a:gs>
+                <a:gs pos="99000">
+                  <a:srgbClr val="C8DFFA"/>
+                </a:gs>
+                <a:gs pos="0">
+                  <a:srgbClr val="2446C8"/>
+                </a:gs>
+              </a:gsLst>
+              <a:lin ang="2700000" scaled="0"/>
+            </a:gradFill>
+            <a:ln>
+              <a:noFill/>
+            </a:ln>
+          </p:spPr>
+          <p:style>
+            <a:lnRef idx="2">
+              <a:schemeClr val="accent1">
+                <a:shade val="50000"/>
+              </a:schemeClr>
+            </a:lnRef>
+            <a:fillRef idx="1">
+              <a:schemeClr val="accent1"/>
+            </a:fillRef>
+            <a:effectRef idx="0">
+              <a:schemeClr val="accent1"/>
+            </a:effectRef>
+            <a:fontRef idx="minor">
+              <a:schemeClr val="lt1"/>
+            </a:fontRef>
+          </p:style>
+          <p:txBody>
+            <a:bodyPr rtlCol="0" anchor="ctr"/>
+            <a:lstStyle/>
+            <a:p>
+              <a:pPr algn="ctr"/>
+              <a:endParaRPr lang="ru-RU"/>
+            </a:p>
+          </p:txBody>
+        </p:sp>
+        <p:sp>
+          <p:nvSpPr>
+            <p:cNvPr id="12" name="Прямоугольный треугольник 11"/>
+            <p:cNvSpPr/>
+            <p:nvPr/>
+          </p:nvSpPr>
+          <p:spPr>
+            <a:xfrm>
+              <a:off x="1638300" y="838199"/>
+              <a:ext cx="1257300" cy="1447801"/>
+            </a:xfrm>
+            <a:prstGeom prst="rtTriangle">
+              <a:avLst/>
+            </a:prstGeom>
+            <a:gradFill>
+              <a:gsLst>
+                <a:gs pos="100000">
+                  <a:srgbClr val="82A0FA"/>
+                </a:gs>
+                <a:gs pos="0">
+                  <a:srgbClr val="C8DFFA"/>
+                </a:gs>
+                <a:gs pos="100000">
+                  <a:srgbClr val="2446C8"/>
+                </a:gs>
+              </a:gsLst>
+              <a:lin ang="2700000" scaled="0"/>
+            </a:gradFill>
+            <a:ln>
+              <a:noFill/>
+            </a:ln>
+          </p:spPr>
+          <p:style>
+            <a:lnRef idx="2">
+              <a:schemeClr val="accent1">
+                <a:shade val="50000"/>
+              </a:schemeClr>
+            </a:lnRef>
+            <a:fillRef idx="1">
+              <a:schemeClr val="accent1"/>
+            </a:fillRef>
+            <a:effectRef idx="0">
+              <a:schemeClr val="accent1"/>
+            </a:effectRef>
+            <a:fontRef idx="minor">
+              <a:schemeClr val="lt1"/>
+            </a:fontRef>
+          </p:style>
+          <p:txBody>
+            <a:bodyPr rtlCol="0" anchor="ctr"/>
+            <a:lstStyle/>
+            <a:p>
+              <a:pPr algn="ctr"/>
+              <a:endParaRPr lang="ru-RU"/>
+            </a:p>
+          </p:txBody>
+        </p:sp>
+        <p:sp>
+          <p:nvSpPr>
+            <p:cNvPr id="13" name="Прямоугольный треугольник 12"/>
+            <p:cNvSpPr/>
+            <p:nvPr/>
+          </p:nvSpPr>
+          <p:spPr>
+            <a:xfrm rot="5340000">
+              <a:off x="1625843" y="4350627"/>
+              <a:ext cx="1434413" cy="1282331"/>
+            </a:xfrm>
+            <a:prstGeom prst="rtTriangle">
+              <a:avLst/>
+            </a:prstGeom>
+            <a:gradFill>
+              <a:gsLst>
+                <a:gs pos="66000">
+                  <a:srgbClr val="82A0FA"/>
+                </a:gs>
+                <a:gs pos="100000">
+                  <a:srgbClr val="C8DFFA"/>
+                </a:gs>
+                <a:gs pos="0">
+                  <a:srgbClr val="2446C8"/>
+                </a:gs>
+              </a:gsLst>
+              <a:lin ang="8100000" scaled="0"/>
+            </a:gradFill>
+            <a:ln>
+              <a:noFill/>
+            </a:ln>
+          </p:spPr>
+          <p:style>
+            <a:lnRef idx="2">
+              <a:schemeClr val="accent1">
+                <a:shade val="50000"/>
+              </a:schemeClr>
+            </a:lnRef>
+            <a:fillRef idx="1">
+              <a:schemeClr val="accent1"/>
+            </a:fillRef>
+            <a:effectRef idx="0">
+              <a:schemeClr val="accent1"/>
+            </a:effectRef>
+            <a:fontRef idx="minor">
+              <a:schemeClr val="lt1"/>
+            </a:fontRef>
+          </p:style>
+          <p:txBody>
+            <a:bodyPr rtlCol="0" anchor="ctr"/>
+            <a:lstStyle/>
+            <a:p>
+              <a:pPr algn="ctr"/>
+              <a:endParaRPr lang="ru-RU"/>
+            </a:p>
+          </p:txBody>
+        </p:sp>
+      </p:grpSp>
+      <p:sp>
+        <p:nvSpPr>
+          <p:cNvPr id="6" name="TextBox 5"/>
+          <p:cNvSpPr txBox="1"/>
+          <p:nvPr/>
+        </p:nvSpPr>
+        <p:spPr>
+          <a:xfrm>
+            <a:off x="4946172" y="560338"/>
+            <a:ext cx="6962355" cy="2308324"/>
+          </a:xfrm>
+          <a:prstGeom prst="rect">
+            <a:avLst/>
+          </a:prstGeom>
+          <a:noFill/>
+        </p:spPr>
+        <p:txBody>
+          <a:bodyPr wrap="none" lIns="0" tIns="0" rIns="0" bIns="0" rtlCol="0">
+            <a:spAutoFit/>
+          </a:bodyPr>
+          <a:lstStyle/>
+          <a:p>
+            <a:r>
+              <a:rPr lang="en-US" sz="15000" dirty="0" smtClean="0">
+                <a:solidFill>
+                  <a:schemeClr val="bg1">
+                    <a:lumMod val="50000"/>
+                  </a:schemeClr>
+                </a:solidFill>
+              </a:rPr>
+              <a:t>STARTUP</a:t>
+            </a:r>
+            <a:endParaRPr lang="en-US" sz="15000" dirty="0" smtClean="0">
+              <a:solidFill>
+                <a:schemeClr val="bg1">
+                  <a:lumMod val="50000"/>
+                </a:schemeClr>
+              </a:solidFill>
+            </a:endParaRPr>
+          </a:p>
+        </p:txBody>
+      </p:sp>
+      <p:sp>
+        <p:nvSpPr>
+          <p:cNvPr id="7" name="TextBox 6"/>
+          <p:cNvSpPr txBox="1"/>
+          <p:nvPr/>
+        </p:nvSpPr>
+        <p:spPr>
+          <a:xfrm>
+            <a:off x="4648200" y="2299606"/>
+            <a:ext cx="7121245" cy="4616648"/>
+          </a:xfrm>
+          <a:prstGeom prst="rect">
+            <a:avLst/>
+          </a:prstGeom>
+          <a:noFill/>
+        </p:spPr>
+        <p:txBody>
+          <a:bodyPr wrap="none" lIns="0" tIns="0" rIns="0" bIns="0" rtlCol="0">
+            <a:spAutoFit/>
+          </a:bodyPr>
+          <a:lstStyle/>
+          <a:p>
+            <a:r>
+              <a:rPr lang="en-US" sz="30000" kern="2000" spc="-2000" dirty="0" smtClean="0">
+                <a:solidFill>
+                  <a:schemeClr val="bg1">
+                    <a:lumMod val="50000"/>
+                  </a:schemeClr>
+                </a:solidFill>
+              </a:rPr>
+              <a:t>CLUB</a:t>
+            </a:r>
+            <a:endParaRPr lang="en-US" sz="30000" kern="2000" spc="-2000" dirty="0">
+              <a:solidFill>
+                <a:schemeClr val="bg1">
+                  <a:lumMod val="50000"/>
+                </a:schemeClr>
+              </a:solidFill>
+            </a:endParaRPr>
+          </a:p>
+        </p:txBody>
+      </p:sp>
+    </p:spTree>
+    <p:extLst>
+      <p:ext uri="{BB962C8B-B14F-4D97-AF65-F5344CB8AC3E}">
+        <p14:creationId xmlns:p14="http://schemas.microsoft.com/office/powerpoint/2010/main" val="4018585134"/>
+      </p:ext>
+    </p:extLst>
+  </p:cSld>
+  <p:clrMapOvr>
+    <a:masterClrMapping/>
+  </p:clrMapOvr>
+</p:sld>
+</file>
+
 <file path=ppt/theme/theme1.xml><?xml version="1.0" encoding="utf-8"?>
 <a:theme xmlns:a="http://schemas.openxmlformats.org/drawingml/2006/main" name="Тема Office">
   <a:themeElements>

--- a/a/New CFE logo final long.pptx
+++ b/a/New CFE logo final long.pptx
@@ -7,6 +7,7 @@
   <p:sldIdLst>
     <p:sldId id="256" r:id="rId2"/>
     <p:sldId id="257" r:id="rId3"/>
+    <p:sldId id="258" r:id="rId4"/>
   </p:sldIdLst>
   <p:sldSz cx="27432000" cy="6858000"/>
   <p:notesSz cx="6858000" cy="9144000"/>
@@ -289,7 +290,7 @@
           <a:p>
             <a:fld id="{DD72279B-67D5-48A9-B319-AD0740CF3773}" type="datetimeFigureOut">
               <a:rPr lang="ru-RU" smtClean="0"/>
-              <a:t>28.06.2024</a:t>
+              <a:t>03.07.2024</a:t>
             </a:fld>
             <a:endParaRPr lang="ru-RU"/>
           </a:p>
@@ -459,7 +460,7 @@
           <a:p>
             <a:fld id="{DD72279B-67D5-48A9-B319-AD0740CF3773}" type="datetimeFigureOut">
               <a:rPr lang="ru-RU" smtClean="0"/>
-              <a:t>28.06.2024</a:t>
+              <a:t>03.07.2024</a:t>
             </a:fld>
             <a:endParaRPr lang="ru-RU"/>
           </a:p>
@@ -639,7 +640,7 @@
           <a:p>
             <a:fld id="{DD72279B-67D5-48A9-B319-AD0740CF3773}" type="datetimeFigureOut">
               <a:rPr lang="ru-RU" smtClean="0"/>
-              <a:t>28.06.2024</a:t>
+              <a:t>03.07.2024</a:t>
             </a:fld>
             <a:endParaRPr lang="ru-RU"/>
           </a:p>
@@ -809,7 +810,7 @@
           <a:p>
             <a:fld id="{DD72279B-67D5-48A9-B319-AD0740CF3773}" type="datetimeFigureOut">
               <a:rPr lang="ru-RU" smtClean="0"/>
-              <a:t>28.06.2024</a:t>
+              <a:t>03.07.2024</a:t>
             </a:fld>
             <a:endParaRPr lang="ru-RU"/>
           </a:p>
@@ -1055,7 +1056,7 @@
           <a:p>
             <a:fld id="{DD72279B-67D5-48A9-B319-AD0740CF3773}" type="datetimeFigureOut">
               <a:rPr lang="ru-RU" smtClean="0"/>
-              <a:t>28.06.2024</a:t>
+              <a:t>03.07.2024</a:t>
             </a:fld>
             <a:endParaRPr lang="ru-RU"/>
           </a:p>
@@ -1343,7 +1344,7 @@
           <a:p>
             <a:fld id="{DD72279B-67D5-48A9-B319-AD0740CF3773}" type="datetimeFigureOut">
               <a:rPr lang="ru-RU" smtClean="0"/>
-              <a:t>28.06.2024</a:t>
+              <a:t>03.07.2024</a:t>
             </a:fld>
             <a:endParaRPr lang="ru-RU"/>
           </a:p>
@@ -1765,7 +1766,7 @@
           <a:p>
             <a:fld id="{DD72279B-67D5-48A9-B319-AD0740CF3773}" type="datetimeFigureOut">
               <a:rPr lang="ru-RU" smtClean="0"/>
-              <a:t>28.06.2024</a:t>
+              <a:t>03.07.2024</a:t>
             </a:fld>
             <a:endParaRPr lang="ru-RU"/>
           </a:p>
@@ -1883,7 +1884,7 @@
           <a:p>
             <a:fld id="{DD72279B-67D5-48A9-B319-AD0740CF3773}" type="datetimeFigureOut">
               <a:rPr lang="ru-RU" smtClean="0"/>
-              <a:t>28.06.2024</a:t>
+              <a:t>03.07.2024</a:t>
             </a:fld>
             <a:endParaRPr lang="ru-RU"/>
           </a:p>
@@ -1978,7 +1979,7 @@
           <a:p>
             <a:fld id="{DD72279B-67D5-48A9-B319-AD0740CF3773}" type="datetimeFigureOut">
               <a:rPr lang="ru-RU" smtClean="0"/>
-              <a:t>28.06.2024</a:t>
+              <a:t>03.07.2024</a:t>
             </a:fld>
             <a:endParaRPr lang="ru-RU"/>
           </a:p>
@@ -2255,7 +2256,7 @@
           <a:p>
             <a:fld id="{DD72279B-67D5-48A9-B319-AD0740CF3773}" type="datetimeFigureOut">
               <a:rPr lang="ru-RU" smtClean="0"/>
-              <a:t>28.06.2024</a:t>
+              <a:t>03.07.2024</a:t>
             </a:fld>
             <a:endParaRPr lang="ru-RU"/>
           </a:p>
@@ -2508,7 +2509,7 @@
           <a:p>
             <a:fld id="{DD72279B-67D5-48A9-B319-AD0740CF3773}" type="datetimeFigureOut">
               <a:rPr lang="ru-RU" smtClean="0"/>
-              <a:t>28.06.2024</a:t>
+              <a:t>03.07.2024</a:t>
             </a:fld>
             <a:endParaRPr lang="ru-RU"/>
           </a:p>
@@ -2721,7 +2722,7 @@
           <a:p>
             <a:fld id="{DD72279B-67D5-48A9-B319-AD0740CF3773}" type="datetimeFigureOut">
               <a:rPr lang="ru-RU" smtClean="0"/>
-              <a:t>28.06.2024</a:t>
+              <a:t>03.07.2024</a:t>
             </a:fld>
             <a:endParaRPr lang="ru-RU"/>
           </a:p>
@@ -3882,13 +3883,6 @@
               </a:rPr>
               <a:t>STARTUP</a:t>
             </a:r>
-            <a:endParaRPr lang="en-US" sz="15000" dirty="0" smtClean="0">
-              <a:solidFill>
-                <a:schemeClr val="bg1">
-                  <a:lumMod val="50000"/>
-                </a:schemeClr>
-              </a:solidFill>
-            </a:endParaRPr>
           </a:p>
         </p:txBody>
       </p:sp>
@@ -3938,6 +3932,159 @@
     <p:extLst>
       <p:ext uri="{BB962C8B-B14F-4D97-AF65-F5344CB8AC3E}">
         <p14:creationId xmlns:p14="http://schemas.microsoft.com/office/powerpoint/2010/main" val="4018585134"/>
+      </p:ext>
+    </p:extLst>
+  </p:cSld>
+  <p:clrMapOvr>
+    <a:masterClrMapping/>
+  </p:clrMapOvr>
+</p:sld>
+</file>
+
+<file path=ppt/slides/slide3.xml><?xml version="1.0" encoding="utf-8"?>
+<p:sld xmlns:a="http://schemas.openxmlformats.org/drawingml/2006/main" xmlns:r="http://schemas.openxmlformats.org/officeDocument/2006/relationships" xmlns:p="http://schemas.openxmlformats.org/presentationml/2006/main">
+  <p:cSld>
+    <p:spTree>
+      <p:nvGrpSpPr>
+        <p:cNvPr id="1" name=""/>
+        <p:cNvGrpSpPr/>
+        <p:nvPr/>
+      </p:nvGrpSpPr>
+      <p:grpSpPr>
+        <a:xfrm>
+          <a:off x="0" y="0"/>
+          <a:ext cx="0" cy="0"/>
+          <a:chOff x="0" y="0"/>
+          <a:chExt cx="0" cy="0"/>
+        </a:xfrm>
+      </p:grpSpPr>
+      <p:pic>
+        <p:nvPicPr>
+          <p:cNvPr id="1026" name="Picture 2" descr="C:\!DISK\116 WEBSITES AND DOMAINS\cfeglobal.org\images\scaleup-logo.png"/>
+          <p:cNvPicPr>
+            <a:picLocks noChangeAspect="1" noChangeArrowheads="1"/>
+          </p:cNvPicPr>
+          <p:nvPr/>
+        </p:nvPicPr>
+        <p:blipFill>
+          <a:blip r:embed="rId2">
+            <a:extLst>
+              <a:ext uri="{28A0092B-C50C-407E-A947-70E740481C1C}">
+                <a14:useLocalDpi xmlns:a14="http://schemas.microsoft.com/office/drawing/2010/main" val="0"/>
+              </a:ext>
+            </a:extLst>
+          </a:blip>
+          <a:srcRect/>
+          <a:stretch>
+            <a:fillRect/>
+          </a:stretch>
+        </p:blipFill>
+        <p:spPr bwMode="auto">
+          <a:xfrm>
+            <a:off x="1652015" y="228600"/>
+            <a:ext cx="5273832" cy="1490663"/>
+          </a:xfrm>
+          <a:prstGeom prst="rect">
+            <a:avLst/>
+          </a:prstGeom>
+          <a:noFill/>
+          <a:extLst>
+            <a:ext uri="{909E8E84-426E-40DD-AFC4-6F175D3DCCD1}">
+              <a14:hiddenFill xmlns:a14="http://schemas.microsoft.com/office/drawing/2010/main">
+                <a:solidFill>
+                  <a:srgbClr val="FFFFFF"/>
+                </a:solidFill>
+              </a14:hiddenFill>
+            </a:ext>
+          </a:extLst>
+        </p:spPr>
+      </p:pic>
+      <p:pic>
+        <p:nvPicPr>
+          <p:cNvPr id="1027" name="Picture 3" descr="C:\!DISK\116 WEBSITES AND DOMAINS\cfeglobal.org\images\startup-club-logo.png"/>
+          <p:cNvPicPr>
+            <a:picLocks noChangeAspect="1" noChangeArrowheads="1"/>
+          </p:cNvPicPr>
+          <p:nvPr/>
+        </p:nvPicPr>
+        <p:blipFill>
+          <a:blip r:embed="rId3" cstate="print">
+            <a:extLst>
+              <a:ext uri="{28A0092B-C50C-407E-A947-70E740481C1C}">
+                <a14:useLocalDpi xmlns:a14="http://schemas.microsoft.com/office/drawing/2010/main" val="0"/>
+              </a:ext>
+            </a:extLst>
+          </a:blip>
+          <a:srcRect/>
+          <a:stretch>
+            <a:fillRect/>
+          </a:stretch>
+        </p:blipFill>
+        <p:spPr bwMode="auto">
+          <a:xfrm>
+            <a:off x="1880265" y="4495800"/>
+            <a:ext cx="5057775" cy="2144722"/>
+          </a:xfrm>
+          <a:prstGeom prst="rect">
+            <a:avLst/>
+          </a:prstGeom>
+          <a:noFill/>
+          <a:extLst>
+            <a:ext uri="{909E8E84-426E-40DD-AFC4-6F175D3DCCD1}">
+              <a14:hiddenFill xmlns:a14="http://schemas.microsoft.com/office/drawing/2010/main">
+                <a:solidFill>
+                  <a:srgbClr val="FFFFFF"/>
+                </a:solidFill>
+              </a14:hiddenFill>
+            </a:ext>
+          </a:extLst>
+        </p:spPr>
+      </p:pic>
+      <p:pic>
+        <p:nvPicPr>
+          <p:cNvPr id="1028" name="Picture 4" descr="C:\!DISK\116 WEBSITES AND DOMAINS\cfeglobal.org\images\dynamic-entrepreneurship-classroom.png"/>
+          <p:cNvPicPr>
+            <a:picLocks noChangeAspect="1" noChangeArrowheads="1"/>
+          </p:cNvPicPr>
+          <p:nvPr/>
+        </p:nvPicPr>
+        <p:blipFill>
+          <a:blip r:embed="rId4">
+            <a:extLst>
+              <a:ext uri="{28A0092B-C50C-407E-A947-70E740481C1C}">
+                <a14:useLocalDpi xmlns:a14="http://schemas.microsoft.com/office/drawing/2010/main" val="0"/>
+              </a:ext>
+            </a:extLst>
+          </a:blip>
+          <a:srcRect/>
+          <a:stretch>
+            <a:fillRect/>
+          </a:stretch>
+        </p:blipFill>
+        <p:spPr bwMode="auto">
+          <a:xfrm>
+            <a:off x="1795712" y="2438400"/>
+            <a:ext cx="5130135" cy="1226134"/>
+          </a:xfrm>
+          <a:prstGeom prst="rect">
+            <a:avLst/>
+          </a:prstGeom>
+          <a:noFill/>
+          <a:extLst>
+            <a:ext uri="{909E8E84-426E-40DD-AFC4-6F175D3DCCD1}">
+              <a14:hiddenFill xmlns:a14="http://schemas.microsoft.com/office/drawing/2010/main">
+                <a:solidFill>
+                  <a:srgbClr val="FFFFFF"/>
+                </a:solidFill>
+              </a14:hiddenFill>
+            </a:ext>
+          </a:extLst>
+        </p:spPr>
+      </p:pic>
+    </p:spTree>
+    <p:extLst>
+      <p:ext uri="{BB962C8B-B14F-4D97-AF65-F5344CB8AC3E}">
+        <p14:creationId xmlns:p14="http://schemas.microsoft.com/office/powerpoint/2010/main" val="2561890861"/>
       </p:ext>
     </p:extLst>
   </p:cSld>

--- a/a/New CFE logo final long.pptx
+++ b/a/New CFE logo final long.pptx
@@ -290,7 +290,7 @@
           <a:p>
             <a:fld id="{DD72279B-67D5-48A9-B319-AD0740CF3773}" type="datetimeFigureOut">
               <a:rPr lang="ru-RU" smtClean="0"/>
-              <a:t>03.07.2024</a:t>
+              <a:t>04.07.2024</a:t>
             </a:fld>
             <a:endParaRPr lang="ru-RU"/>
           </a:p>
@@ -460,7 +460,7 @@
           <a:p>
             <a:fld id="{DD72279B-67D5-48A9-B319-AD0740CF3773}" type="datetimeFigureOut">
               <a:rPr lang="ru-RU" smtClean="0"/>
-              <a:t>03.07.2024</a:t>
+              <a:t>04.07.2024</a:t>
             </a:fld>
             <a:endParaRPr lang="ru-RU"/>
           </a:p>
@@ -640,7 +640,7 @@
           <a:p>
             <a:fld id="{DD72279B-67D5-48A9-B319-AD0740CF3773}" type="datetimeFigureOut">
               <a:rPr lang="ru-RU" smtClean="0"/>
-              <a:t>03.07.2024</a:t>
+              <a:t>04.07.2024</a:t>
             </a:fld>
             <a:endParaRPr lang="ru-RU"/>
           </a:p>
@@ -810,7 +810,7 @@
           <a:p>
             <a:fld id="{DD72279B-67D5-48A9-B319-AD0740CF3773}" type="datetimeFigureOut">
               <a:rPr lang="ru-RU" smtClean="0"/>
-              <a:t>03.07.2024</a:t>
+              <a:t>04.07.2024</a:t>
             </a:fld>
             <a:endParaRPr lang="ru-RU"/>
           </a:p>
@@ -1056,7 +1056,7 @@
           <a:p>
             <a:fld id="{DD72279B-67D5-48A9-B319-AD0740CF3773}" type="datetimeFigureOut">
               <a:rPr lang="ru-RU" smtClean="0"/>
-              <a:t>03.07.2024</a:t>
+              <a:t>04.07.2024</a:t>
             </a:fld>
             <a:endParaRPr lang="ru-RU"/>
           </a:p>
@@ -1344,7 +1344,7 @@
           <a:p>
             <a:fld id="{DD72279B-67D5-48A9-B319-AD0740CF3773}" type="datetimeFigureOut">
               <a:rPr lang="ru-RU" smtClean="0"/>
-              <a:t>03.07.2024</a:t>
+              <a:t>04.07.2024</a:t>
             </a:fld>
             <a:endParaRPr lang="ru-RU"/>
           </a:p>
@@ -1766,7 +1766,7 @@
           <a:p>
             <a:fld id="{DD72279B-67D5-48A9-B319-AD0740CF3773}" type="datetimeFigureOut">
               <a:rPr lang="ru-RU" smtClean="0"/>
-              <a:t>03.07.2024</a:t>
+              <a:t>04.07.2024</a:t>
             </a:fld>
             <a:endParaRPr lang="ru-RU"/>
           </a:p>
@@ -1884,7 +1884,7 @@
           <a:p>
             <a:fld id="{DD72279B-67D5-48A9-B319-AD0740CF3773}" type="datetimeFigureOut">
               <a:rPr lang="ru-RU" smtClean="0"/>
-              <a:t>03.07.2024</a:t>
+              <a:t>04.07.2024</a:t>
             </a:fld>
             <a:endParaRPr lang="ru-RU"/>
           </a:p>
@@ -1979,7 +1979,7 @@
           <a:p>
             <a:fld id="{DD72279B-67D5-48A9-B319-AD0740CF3773}" type="datetimeFigureOut">
               <a:rPr lang="ru-RU" smtClean="0"/>
-              <a:t>03.07.2024</a:t>
+              <a:t>04.07.2024</a:t>
             </a:fld>
             <a:endParaRPr lang="ru-RU"/>
           </a:p>
@@ -2256,7 +2256,7 @@
           <a:p>
             <a:fld id="{DD72279B-67D5-48A9-B319-AD0740CF3773}" type="datetimeFigureOut">
               <a:rPr lang="ru-RU" smtClean="0"/>
-              <a:t>03.07.2024</a:t>
+              <a:t>04.07.2024</a:t>
             </a:fld>
             <a:endParaRPr lang="ru-RU"/>
           </a:p>
@@ -2509,7 +2509,7 @@
           <a:p>
             <a:fld id="{DD72279B-67D5-48A9-B319-AD0740CF3773}" type="datetimeFigureOut">
               <a:rPr lang="ru-RU" smtClean="0"/>
-              <a:t>03.07.2024</a:t>
+              <a:t>04.07.2024</a:t>
             </a:fld>
             <a:endParaRPr lang="ru-RU"/>
           </a:p>
@@ -2722,7 +2722,7 @@
           <a:p>
             <a:fld id="{DD72279B-67D5-48A9-B319-AD0740CF3773}" type="datetimeFigureOut">
               <a:rPr lang="ru-RU" smtClean="0"/>
-              <a:t>03.07.2024</a:t>
+              <a:t>04.07.2024</a:t>
             </a:fld>
             <a:endParaRPr lang="ru-RU"/>
           </a:p>
@@ -4081,6 +4081,211 @@
           </a:extLst>
         </p:spPr>
       </p:pic>
+      <p:pic>
+        <p:nvPicPr>
+          <p:cNvPr id="5" name="Picture 3" descr="C:\!DISK\116 WEBSITES AND DOMAINS\cfeglobal.org\images\startup-club-logo.png"/>
+          <p:cNvPicPr>
+            <a:picLocks noChangeAspect="1" noChangeArrowheads="1"/>
+          </p:cNvPicPr>
+          <p:nvPr/>
+        </p:nvPicPr>
+        <p:blipFill>
+          <a:blip r:embed="rId3" cstate="print">
+            <a:extLst>
+              <a:ext uri="{28A0092B-C50C-407E-A947-70E740481C1C}">
+                <a14:useLocalDpi xmlns:a14="http://schemas.microsoft.com/office/drawing/2010/main" val="0"/>
+              </a:ext>
+            </a:extLst>
+          </a:blip>
+          <a:srcRect/>
+          <a:stretch>
+            <a:fillRect/>
+          </a:stretch>
+        </p:blipFill>
+        <p:spPr bwMode="auto">
+          <a:xfrm>
+            <a:off x="8077200" y="100049"/>
+            <a:ext cx="5057775" cy="2144722"/>
+          </a:xfrm>
+          <a:prstGeom prst="rect">
+            <a:avLst/>
+          </a:prstGeom>
+          <a:noFill/>
+          <a:extLst>
+            <a:ext uri="{909E8E84-426E-40DD-AFC4-6F175D3DCCD1}">
+              <a14:hiddenFill xmlns:a14="http://schemas.microsoft.com/office/drawing/2010/main">
+                <a:solidFill>
+                  <a:srgbClr val="FFFFFF"/>
+                </a:solidFill>
+              </a14:hiddenFill>
+            </a:ext>
+          </a:extLst>
+        </p:spPr>
+      </p:pic>
+      <p:pic>
+        <p:nvPicPr>
+          <p:cNvPr id="2" name="Picture 2" descr="C:\!DISK\116 WEBSITES AND DOMAINS\cfeglobal.org\images\fasttrac.png"/>
+          <p:cNvPicPr>
+            <a:picLocks noChangeAspect="1" noChangeArrowheads="1"/>
+          </p:cNvPicPr>
+          <p:nvPr/>
+        </p:nvPicPr>
+        <p:blipFill>
+          <a:blip r:embed="rId5">
+            <a:extLst>
+              <a:ext uri="{28A0092B-C50C-407E-A947-70E740481C1C}">
+                <a14:useLocalDpi xmlns:a14="http://schemas.microsoft.com/office/drawing/2010/main" val="0"/>
+              </a:ext>
+            </a:extLst>
+          </a:blip>
+          <a:srcRect/>
+          <a:stretch>
+            <a:fillRect/>
+          </a:stretch>
+        </p:blipFill>
+        <p:spPr bwMode="auto">
+          <a:xfrm>
+            <a:off x="8336900" y="6107770"/>
+            <a:ext cx="4724400" cy="532752"/>
+          </a:xfrm>
+          <a:prstGeom prst="rect">
+            <a:avLst/>
+          </a:prstGeom>
+          <a:noFill/>
+          <a:extLst>
+            <a:ext uri="{909E8E84-426E-40DD-AFC4-6F175D3DCCD1}">
+              <a14:hiddenFill xmlns:a14="http://schemas.microsoft.com/office/drawing/2010/main">
+                <a:solidFill>
+                  <a:srgbClr val="FFFFFF"/>
+                </a:solidFill>
+              </a14:hiddenFill>
+            </a:ext>
+          </a:extLst>
+        </p:spPr>
+      </p:pic>
+      <p:pic>
+        <p:nvPicPr>
+          <p:cNvPr id="3" name="Picture 3" descr="C:\!DISK\116 WEBSITES AND DOMAINS\cfeglobal.org\images\startup-huddle-logo.png"/>
+          <p:cNvPicPr>
+            <a:picLocks noChangeAspect="1" noChangeArrowheads="1"/>
+          </p:cNvPicPr>
+          <p:nvPr/>
+        </p:nvPicPr>
+        <p:blipFill>
+          <a:blip r:embed="rId6">
+            <a:extLst>
+              <a:ext uri="{28A0092B-C50C-407E-A947-70E740481C1C}">
+                <a14:useLocalDpi xmlns:a14="http://schemas.microsoft.com/office/drawing/2010/main" val="0"/>
+              </a:ext>
+            </a:extLst>
+          </a:blip>
+          <a:srcRect/>
+          <a:stretch>
+            <a:fillRect/>
+          </a:stretch>
+        </p:blipFill>
+        <p:spPr bwMode="auto">
+          <a:xfrm>
+            <a:off x="8104630" y="3276600"/>
+            <a:ext cx="5188939" cy="2062961"/>
+          </a:xfrm>
+          <a:prstGeom prst="rect">
+            <a:avLst/>
+          </a:prstGeom>
+          <a:noFill/>
+          <a:extLst>
+            <a:ext uri="{909E8E84-426E-40DD-AFC4-6F175D3DCCD1}">
+              <a14:hiddenFill xmlns:a14="http://schemas.microsoft.com/office/drawing/2010/main">
+                <a:solidFill>
+                  <a:srgbClr val="FFFFFF"/>
+                </a:solidFill>
+              </a14:hiddenFill>
+            </a:ext>
+          </a:extLst>
+        </p:spPr>
+      </p:pic>
+      <p:pic>
+        <p:nvPicPr>
+          <p:cNvPr id="9" name="Picture 3" descr="C:\!DISK\116 WEBSITES AND DOMAINS\cfeglobal.org\images\startup-club-logo.png"/>
+          <p:cNvPicPr>
+            <a:picLocks noChangeAspect="1" noChangeArrowheads="1"/>
+          </p:cNvPicPr>
+          <p:nvPr/>
+        </p:nvPicPr>
+        <p:blipFill>
+          <a:blip r:embed="rId3" cstate="print">
+            <a:extLst>
+              <a:ext uri="{28A0092B-C50C-407E-A947-70E740481C1C}">
+                <a14:useLocalDpi xmlns:a14="http://schemas.microsoft.com/office/drawing/2010/main" val="0"/>
+              </a:ext>
+            </a:extLst>
+          </a:blip>
+          <a:srcRect/>
+          <a:stretch>
+            <a:fillRect/>
+          </a:stretch>
+        </p:blipFill>
+        <p:spPr bwMode="auto">
+          <a:xfrm>
+            <a:off x="13868400" y="115289"/>
+            <a:ext cx="5057775" cy="2144722"/>
+          </a:xfrm>
+          <a:prstGeom prst="rect">
+            <a:avLst/>
+          </a:prstGeom>
+          <a:noFill/>
+          <a:extLst>
+            <a:ext uri="{909E8E84-426E-40DD-AFC4-6F175D3DCCD1}">
+              <a14:hiddenFill xmlns:a14="http://schemas.microsoft.com/office/drawing/2010/main">
+                <a:solidFill>
+                  <a:srgbClr val="FFFFFF"/>
+                </a:solidFill>
+              </a14:hiddenFill>
+            </a:ext>
+          </a:extLst>
+        </p:spPr>
+      </p:pic>
+      <p:pic>
+        <p:nvPicPr>
+          <p:cNvPr id="10" name="Picture 2" descr="C:\!DISK\116 WEBSITES AND DOMAINS\cfeglobal.org\images\fasttrac.png"/>
+          <p:cNvPicPr>
+            <a:picLocks noChangeAspect="1" noChangeArrowheads="1"/>
+          </p:cNvPicPr>
+          <p:nvPr/>
+        </p:nvPicPr>
+        <p:blipFill>
+          <a:blip r:embed="rId5">
+            <a:extLst>
+              <a:ext uri="{28A0092B-C50C-407E-A947-70E740481C1C}">
+                <a14:useLocalDpi xmlns:a14="http://schemas.microsoft.com/office/drawing/2010/main" val="0"/>
+              </a:ext>
+            </a:extLst>
+          </a:blip>
+          <a:srcRect/>
+          <a:stretch>
+            <a:fillRect/>
+          </a:stretch>
+        </p:blipFill>
+        <p:spPr bwMode="auto">
+          <a:xfrm>
+            <a:off x="14155532" y="3243488"/>
+            <a:ext cx="4724400" cy="532752"/>
+          </a:xfrm>
+          <a:prstGeom prst="rect">
+            <a:avLst/>
+          </a:prstGeom>
+          <a:noFill/>
+          <a:extLst>
+            <a:ext uri="{909E8E84-426E-40DD-AFC4-6F175D3DCCD1}">
+              <a14:hiddenFill xmlns:a14="http://schemas.microsoft.com/office/drawing/2010/main">
+                <a:solidFill>
+                  <a:srgbClr val="FFFFFF"/>
+                </a:solidFill>
+              </a14:hiddenFill>
+            </a:ext>
+          </a:extLst>
+        </p:spPr>
+      </p:pic>
     </p:spTree>
     <p:extLst>
       <p:ext uri="{BB962C8B-B14F-4D97-AF65-F5344CB8AC3E}">
